--- a/docs/MetaboTrack_API_Presentation_Slides.pptx
+++ b/docs/MetaboTrack_API_Presentation_Slides.pptx
@@ -6129,8 +6129,9 @@
                 </a:solidFill>
                 <a:latin typeface="Times New Roman" panose="02020603050405020304" charset="0"/>
                 <a:cs typeface="Times New Roman" panose="02020603050405020304" charset="0"/>
-              </a:rPr>
-              <a:t>DTO/VO Pattern: Security &amp; Isolation</a:t>
+                <a:sym typeface="+mn-ea"/>
+              </a:rPr>
+              <a:t>JWT-Based Authentication: </a:t>
             </a:r>
             <a:endParaRPr lang="en-US" altLang="zh-CN" sz="1600" b="1" i="1">
               <a:solidFill>
@@ -6142,79 +6143,67 @@
               <a:cs typeface="Times New Roman" panose="02020603050405020304" charset="0"/>
             </a:endParaRPr>
           </a:p>
-        </p:txBody>
-      </p:sp>
-      <p:pic>
-        <p:nvPicPr>
-          <p:cNvPr id="8" name="图片 7"/>
-          <p:cNvPicPr>
-            <a:picLocks noChangeAspect="1"/>
-          </p:cNvPicPr>
+          <a:p>
+            <a:pPr algn="ctr">
+              <a:lnSpc>
+                <a:spcPct val="130000"/>
+              </a:lnSpc>
+              <a:spcBef>
+                <a:spcPts val="0"/>
+              </a:spcBef>
+              <a:spcAft>
+                <a:spcPts val="0"/>
+              </a:spcAft>
+            </a:pPr>
+            <a:r>
+              <a:rPr lang="en-US" altLang="zh-CN" sz="1600" b="1" i="1">
+                <a:solidFill>
+                  <a:schemeClr val="accent4">
+                    <a:lumMod val="50000"/>
+                  </a:schemeClr>
+                </a:solidFill>
+                <a:latin typeface="Times New Roman" panose="02020603050405020304" charset="0"/>
+                <a:cs typeface="Times New Roman" panose="02020603050405020304" charset="0"/>
+              </a:rPr>
+              <a:t>Security &amp; Isolation</a:t>
+            </a:r>
+            <a:br>
+              <a:rPr lang="en-US" altLang="zh-CN" sz="1600" b="1" i="1">
+                <a:solidFill>
+                  <a:schemeClr val="accent4">
+                    <a:lumMod val="50000"/>
+                  </a:schemeClr>
+                </a:solidFill>
+                <a:latin typeface="Times New Roman" panose="02020603050405020304" charset="0"/>
+                <a:cs typeface="Times New Roman" panose="02020603050405020304" charset="0"/>
+              </a:rPr>
+            </a:br>
+            <a:endParaRPr lang="en-US" altLang="zh-CN" sz="1600" b="1" i="1">
+              <a:solidFill>
+                <a:schemeClr val="accent4">
+                  <a:lumMod val="50000"/>
+                </a:schemeClr>
+              </a:solidFill>
+              <a:latin typeface="Times New Roman" panose="02020603050405020304" charset="0"/>
+              <a:cs typeface="Times New Roman" panose="02020603050405020304" charset="0"/>
+            </a:endParaRPr>
+          </a:p>
+        </p:txBody>
+      </p:sp>
+      <p:sp>
+        <p:nvSpPr>
+          <p:cNvPr id="10" name="文本框 9"/>
+          <p:cNvSpPr txBox="1"/>
           <p:nvPr>
             <p:custDataLst>
               <p:tags r:id="rId4"/>
             </p:custDataLst>
           </p:nvPr>
-        </p:nvPicPr>
-        <p:blipFill>
-          <a:blip r:embed="rId5"/>
-          <a:stretch>
-            <a:fillRect/>
-          </a:stretch>
-        </p:blipFill>
-        <p:spPr>
-          <a:xfrm>
-            <a:off x="402590" y="2121535"/>
-            <a:ext cx="3462020" cy="179070"/>
-          </a:xfrm>
-          <a:prstGeom prst="rect">
-            <a:avLst/>
-          </a:prstGeom>
-        </p:spPr>
-      </p:pic>
-      <p:pic>
-        <p:nvPicPr>
-          <p:cNvPr id="9" name="图片 8"/>
-          <p:cNvPicPr>
-            <a:picLocks noChangeAspect="1"/>
-          </p:cNvPicPr>
-          <p:nvPr>
-            <p:custDataLst>
-              <p:tags r:id="rId6"/>
-            </p:custDataLst>
-          </p:nvPr>
-        </p:nvPicPr>
-        <p:blipFill>
-          <a:blip r:embed="rId7"/>
-          <a:srcRect b="13256"/>
-          <a:stretch>
-            <a:fillRect/>
-          </a:stretch>
-        </p:blipFill>
-        <p:spPr>
-          <a:xfrm>
-            <a:off x="402590" y="2439670"/>
-            <a:ext cx="3462020" cy="1429385"/>
-          </a:xfrm>
-          <a:prstGeom prst="rect">
-            <a:avLst/>
-          </a:prstGeom>
-        </p:spPr>
-      </p:pic>
-      <p:sp>
-        <p:nvSpPr>
-          <p:cNvPr id="10" name="文本框 9"/>
-          <p:cNvSpPr txBox="1"/>
-          <p:nvPr>
-            <p:custDataLst>
-              <p:tags r:id="rId8"/>
-            </p:custDataLst>
-          </p:nvPr>
-        </p:nvSpPr>
-        <p:spPr>
-          <a:xfrm>
-            <a:off x="281940" y="3933190"/>
-            <a:ext cx="3703320" cy="2458085"/>
+        </p:nvSpPr>
+        <p:spPr>
+          <a:xfrm>
+            <a:off x="285750" y="4084955"/>
+            <a:ext cx="3852545" cy="2458085"/>
           </a:xfrm>
           <a:prstGeom prst="rect">
             <a:avLst/>
@@ -6240,7 +6229,7 @@
               <a:buChar char="•"/>
             </a:pPr>
             <a:r>
-              <a:rPr lang="en-US" altLang="zh-CN">
+              <a:rPr lang="en-US" altLang="zh-CN" b="1">
                 <a:solidFill>
                   <a:schemeClr val="accent4">
                     <a:lumMod val="75000"/>
@@ -6249,10 +6238,10 @@
                 <a:latin typeface="Times New Roman" panose="02020603050405020304" charset="0"/>
                 <a:cs typeface="Times New Roman" panose="02020603050405020304" charset="0"/>
               </a:rPr>
-              <a:t>Implemented an </a:t>
-            </a:r>
-            <a:r>
-              <a:rPr lang="en-US" altLang="zh-CN" b="1">
+              <a:t>JWT </a:t>
+            </a:r>
+            <a:r>
+              <a:rPr lang="en-US" altLang="zh-CN">
                 <a:solidFill>
                   <a:schemeClr val="accent4">
                     <a:lumMod val="75000"/>
@@ -6261,19 +6250,7 @@
                 <a:latin typeface="Times New Roman" panose="02020603050405020304" charset="0"/>
                 <a:cs typeface="Times New Roman" panose="02020603050405020304" charset="0"/>
               </a:rPr>
-              <a:t>isolation layer</a:t>
-            </a:r>
-            <a:r>
-              <a:rPr lang="en-US" altLang="zh-CN">
-                <a:solidFill>
-                  <a:schemeClr val="accent4">
-                    <a:lumMod val="75000"/>
-                  </a:schemeClr>
-                </a:solidFill>
-                <a:latin typeface="Times New Roman" panose="02020603050405020304" charset="0"/>
-                <a:cs typeface="Times New Roman" panose="02020603050405020304" charset="0"/>
-              </a:rPr>
-              <a:t> to prevent over-posting attacks. </a:t>
+              <a:t>enables stateless authentication. </a:t>
             </a:r>
             <a:endParaRPr lang="en-US" altLang="zh-CN">
               <a:solidFill>
@@ -6309,7 +6286,7 @@
                 <a:latin typeface="Times New Roman" panose="02020603050405020304" charset="0"/>
                 <a:cs typeface="Times New Roman" panose="02020603050405020304" charset="0"/>
               </a:rPr>
-              <a:t>DTOs</a:t>
+              <a:t>ThreadLocal </a:t>
             </a:r>
             <a:r>
               <a:rPr lang="en-US" altLang="zh-CN">
@@ -6321,9 +6298,21 @@
                 <a:latin typeface="Times New Roman" panose="02020603050405020304" charset="0"/>
                 <a:cs typeface="Times New Roman" panose="02020603050405020304" charset="0"/>
               </a:rPr>
-              <a:t> control input boundaries</a:t>
-            </a:r>
-            <a:endParaRPr lang="en-US" altLang="zh-CN">
+              <a:t>context secures identity extraction</a:t>
+            </a:r>
+            <a:r>
+              <a:rPr lang="en-US" altLang="zh-CN" b="1">
+                <a:solidFill>
+                  <a:schemeClr val="accent4">
+                    <a:lumMod val="75000"/>
+                  </a:schemeClr>
+                </a:solidFill>
+                <a:latin typeface="Times New Roman" panose="02020603050405020304" charset="0"/>
+                <a:cs typeface="Times New Roman" panose="02020603050405020304" charset="0"/>
+              </a:rPr>
+              <a:t>.</a:t>
+            </a:r>
+            <a:endParaRPr lang="en-US" altLang="zh-CN" b="1">
               <a:solidFill>
                 <a:schemeClr val="accent4">
                   <a:lumMod val="75000"/>
@@ -6348,7 +6337,7 @@
               <a:buChar char="•"/>
             </a:pPr>
             <a:r>
-              <a:rPr lang="en-US" altLang="zh-CN" b="1">
+              <a:rPr lang="en-US" altLang="zh-CN">
                 <a:solidFill>
                   <a:schemeClr val="accent4">
                     <a:lumMod val="75000"/>
@@ -6357,10 +6346,10 @@
                 <a:latin typeface="Times New Roman" panose="02020603050405020304" charset="0"/>
                 <a:cs typeface="Times New Roman" panose="02020603050405020304" charset="0"/>
               </a:rPr>
-              <a:t>VOs</a:t>
-            </a:r>
-            <a:r>
-              <a:rPr lang="en-US" altLang="zh-CN">
+              <a:t>Strict </a:t>
+            </a:r>
+            <a:r>
+              <a:rPr lang="en-US" altLang="zh-CN" b="1">
                 <a:solidFill>
                   <a:schemeClr val="accent4">
                     <a:lumMod val="75000"/>
@@ -6369,9 +6358,21 @@
                 <a:latin typeface="Times New Roman" panose="02020603050405020304" charset="0"/>
                 <a:cs typeface="Times New Roman" panose="02020603050405020304" charset="0"/>
               </a:rPr>
-              <a:t> ensure analytical outputs are precisely shaped for frontend requirements.</a:t>
-            </a:r>
-            <a:endParaRPr lang="en-US" altLang="zh-CN">
+              <a:t>user_id</a:t>
+            </a:r>
+            <a:r>
+              <a:rPr lang="en-US" altLang="zh-CN">
+                <a:solidFill>
+                  <a:schemeClr val="accent4">
+                    <a:lumMod val="75000"/>
+                  </a:schemeClr>
+                </a:solidFill>
+                <a:latin typeface="Times New Roman" panose="02020603050405020304" charset="0"/>
+                <a:cs typeface="Times New Roman" panose="02020603050405020304" charset="0"/>
+              </a:rPr>
+              <a:t> binding neutralizes IDOR.</a:t>
+            </a:r>
+            <a:endParaRPr lang="zh-CN" altLang="en-US">
               <a:solidFill>
                 <a:schemeClr val="accent4">
                   <a:lumMod val="75000"/>
@@ -6389,7 +6390,7 @@
           <p:cNvSpPr/>
           <p:nvPr>
             <p:custDataLst>
-              <p:tags r:id="rId9"/>
+              <p:tags r:id="rId5"/>
             </p:custDataLst>
           </p:nvPr>
         </p:nvSpPr>
@@ -6452,7 +6453,7 @@
           <p:cNvSpPr/>
           <p:nvPr>
             <p:custDataLst>
-              <p:tags r:id="rId10"/>
+              <p:tags r:id="rId6"/>
             </p:custDataLst>
           </p:nvPr>
         </p:nvSpPr>
@@ -6532,7 +6533,7 @@
           <p:cNvSpPr txBox="1"/>
           <p:nvPr>
             <p:custDataLst>
-              <p:tags r:id="rId11"/>
+              <p:tags r:id="rId7"/>
             </p:custDataLst>
           </p:nvPr>
         </p:nvSpPr>
@@ -6626,7 +6627,7 @@
           <p:cNvSpPr txBox="1"/>
           <p:nvPr>
             <p:custDataLst>
-              <p:tags r:id="rId12"/>
+              <p:tags r:id="rId8"/>
             </p:custDataLst>
           </p:nvPr>
         </p:nvSpPr>
@@ -6789,7 +6790,7 @@
           <p:cNvSpPr/>
           <p:nvPr>
             <p:custDataLst>
-              <p:tags r:id="rId13"/>
+              <p:tags r:id="rId9"/>
             </p:custDataLst>
           </p:nvPr>
         </p:nvSpPr>
@@ -6852,7 +6853,7 @@
           <p:cNvSpPr/>
           <p:nvPr>
             <p:custDataLst>
-              <p:tags r:id="rId14"/>
+              <p:tags r:id="rId10"/>
             </p:custDataLst>
           </p:nvPr>
         </p:nvSpPr>
@@ -6927,7 +6928,7 @@
           <p:cNvSpPr txBox="1"/>
           <p:nvPr>
             <p:custDataLst>
-              <p:tags r:id="rId15"/>
+              <p:tags r:id="rId11"/>
             </p:custDataLst>
           </p:nvPr>
         </p:nvSpPr>
@@ -7021,7 +7022,7 @@
           <p:cNvSpPr txBox="1"/>
           <p:nvPr>
             <p:custDataLst>
-              <p:tags r:id="rId16"/>
+              <p:tags r:id="rId12"/>
             </p:custDataLst>
           </p:nvPr>
         </p:nvSpPr>
@@ -7096,6 +7097,62 @@
       <p:pic>
         <p:nvPicPr>
           <p:cNvPr id="42" name="图片 41"/>
+          <p:cNvPicPr>
+            <a:picLocks noChangeAspect="1"/>
+          </p:cNvPicPr>
+          <p:nvPr>
+            <p:custDataLst>
+              <p:tags r:id="rId13"/>
+            </p:custDataLst>
+          </p:nvPr>
+        </p:nvPicPr>
+        <p:blipFill>
+          <a:blip r:embed="rId14"/>
+          <a:stretch>
+            <a:fillRect/>
+          </a:stretch>
+        </p:blipFill>
+        <p:spPr>
+          <a:xfrm>
+            <a:off x="4406265" y="2300605"/>
+            <a:ext cx="3543300" cy="1427480"/>
+          </a:xfrm>
+          <a:prstGeom prst="rect">
+            <a:avLst/>
+          </a:prstGeom>
+        </p:spPr>
+      </p:pic>
+      <p:pic>
+        <p:nvPicPr>
+          <p:cNvPr id="43" name="图片 42"/>
+          <p:cNvPicPr>
+            <a:picLocks noChangeAspect="1"/>
+          </p:cNvPicPr>
+          <p:nvPr>
+            <p:custDataLst>
+              <p:tags r:id="rId15"/>
+            </p:custDataLst>
+          </p:nvPr>
+        </p:nvPicPr>
+        <p:blipFill>
+          <a:blip r:embed="rId16"/>
+          <a:stretch>
+            <a:fillRect/>
+          </a:stretch>
+        </p:blipFill>
+        <p:spPr>
+          <a:xfrm>
+            <a:off x="8705850" y="2300605"/>
+            <a:ext cx="3030855" cy="2052955"/>
+          </a:xfrm>
+          <a:prstGeom prst="rect">
+            <a:avLst/>
+          </a:prstGeom>
+        </p:spPr>
+      </p:pic>
+      <p:pic>
+        <p:nvPicPr>
+          <p:cNvPr id="2" name="图片 1"/>
           <p:cNvPicPr>
             <a:picLocks noChangeAspect="1"/>
           </p:cNvPicPr>
@@ -7113,32 +7170,8 @@
         </p:blipFill>
         <p:spPr>
           <a:xfrm>
-            <a:off x="4406265" y="2300605"/>
-            <a:ext cx="3543300" cy="1427480"/>
-          </a:xfrm>
-          <a:prstGeom prst="rect">
-            <a:avLst/>
-          </a:prstGeom>
-        </p:spPr>
-      </p:pic>
-      <p:pic>
-        <p:nvPicPr>
-          <p:cNvPr id="43" name="图片 42"/>
-          <p:cNvPicPr>
-            <a:picLocks noChangeAspect="1"/>
-          </p:cNvPicPr>
-          <p:nvPr/>
-        </p:nvPicPr>
-        <p:blipFill>
-          <a:blip r:embed="rId19"/>
-          <a:stretch>
-            <a:fillRect/>
-          </a:stretch>
-        </p:blipFill>
-        <p:spPr>
-          <a:xfrm>
-            <a:off x="8705850" y="2300605"/>
-            <a:ext cx="3030855" cy="2052955"/>
+            <a:off x="618490" y="2300605"/>
+            <a:ext cx="3031490" cy="1784350"/>
           </a:xfrm>
           <a:prstGeom prst="rect">
             <a:avLst/>
@@ -7393,7 +7426,7 @@
         <p:spPr>
           <a:xfrm>
             <a:off x="535305" y="1805940"/>
-            <a:ext cx="4856480" cy="548640"/>
+            <a:ext cx="4856480" cy="646430"/>
           </a:xfrm>
           <a:prstGeom prst="roundRect">
             <a:avLst/>
@@ -7457,7 +7490,7 @@
                 <a:latin typeface="Times New Roman" panose="02020603050405020304" charset="0"/>
                 <a:cs typeface="Times New Roman" panose="02020603050405020304" charset="0"/>
               </a:rPr>
-              <a:t>Relies on </a:t>
+              <a:t>Stateless logout lacks </a:t>
             </a:r>
             <a:r>
               <a:rPr lang="en-US" altLang="zh-CN" sz="1400" b="1">
@@ -7469,7 +7502,7 @@
                 <a:latin typeface="Times New Roman" panose="02020603050405020304" charset="0"/>
                 <a:cs typeface="Times New Roman" panose="02020603050405020304" charset="0"/>
               </a:rPr>
-              <a:t>raw userId parameters</a:t>
+              <a:t>active token revocation</a:t>
             </a:r>
             <a:r>
               <a:rPr lang="en-US" altLang="zh-CN" sz="1400">
@@ -7481,7 +7514,31 @@
                 <a:latin typeface="Times New Roman" panose="02020603050405020304" charset="0"/>
                 <a:cs typeface="Times New Roman" panose="02020603050405020304" charset="0"/>
               </a:rPr>
-              <a:t>, risking Insecure Direct Object Reference attacks.</a:t>
+              <a:t>. Limited robustness against </a:t>
+            </a:r>
+            <a:r>
+              <a:rPr lang="en-US" altLang="zh-CN" sz="1400" b="1">
+                <a:solidFill>
+                  <a:schemeClr val="accent6">
+                    <a:lumMod val="75000"/>
+                  </a:schemeClr>
+                </a:solidFill>
+                <a:latin typeface="Times New Roman" panose="02020603050405020304" charset="0"/>
+                <a:cs typeface="Times New Roman" panose="02020603050405020304" charset="0"/>
+              </a:rPr>
+              <a:t>complex security challenges</a:t>
+            </a:r>
+            <a:r>
+              <a:rPr lang="en-US" altLang="zh-CN" sz="1400">
+                <a:solidFill>
+                  <a:schemeClr val="accent6">
+                    <a:lumMod val="75000"/>
+                  </a:schemeClr>
+                </a:solidFill>
+                <a:latin typeface="Times New Roman" panose="02020603050405020304" charset="0"/>
+                <a:cs typeface="Times New Roman" panose="02020603050405020304" charset="0"/>
+              </a:rPr>
+              <a:t>.</a:t>
             </a:r>
             <a:endParaRPr lang="en-US" altLang="zh-CN" sz="1400">
               <a:solidFill>
@@ -8417,7 +8474,7 @@
                 <a:latin typeface="Times New Roman" panose="02020603050405020304" charset="0"/>
                 <a:cs typeface="Times New Roman" panose="02020603050405020304" charset="0"/>
               </a:rPr>
-              <a:t> with </a:t>
+              <a:t> for robust, and a </a:t>
             </a:r>
             <a:r>
               <a:rPr lang="en-US" altLang="zh-CN" sz="1400" b="1">
@@ -8429,7 +8486,7 @@
                 <a:latin typeface="Times New Roman" panose="02020603050405020304" charset="0"/>
                 <a:cs typeface="Times New Roman" panose="02020603050405020304" charset="0"/>
               </a:rPr>
-              <a:t>JWT</a:t>
+              <a:t>Redis-based blacklist</a:t>
             </a:r>
             <a:r>
               <a:rPr lang="en-US" altLang="zh-CN" sz="1400">
@@ -8441,9 +8498,9 @@
                 <a:latin typeface="Times New Roman" panose="02020603050405020304" charset="0"/>
                 <a:cs typeface="Times New Roman" panose="02020603050405020304" charset="0"/>
               </a:rPr>
-              <a:t> for robust, stateless authentication.</a:t>
-            </a:r>
-            <a:endParaRPr lang="en-US" altLang="zh-CN" sz="1400">
+              <a:t> for forced logout.</a:t>
+            </a:r>
+            <a:endParaRPr lang="zh-CN" altLang="en-US" sz="1400">
               <a:solidFill>
                 <a:schemeClr val="accent4">
                   <a:lumMod val="75000"/>

--- a/docs/MetaboTrack_API_Presentation_Slides.pptx
+++ b/docs/MetaboTrack_API_Presentation_Slides.pptx
@@ -10,7 +10,7 @@
     <p:sldId id="258" r:id="rId5"/>
     <p:sldId id="259" r:id="rId6"/>
     <p:sldId id="260" r:id="rId7"/>
-    <p:sldId id="261" r:id="rId8"/>
+    <p:sldId id="263" r:id="rId8"/>
     <p:sldId id="262" r:id="rId9"/>
   </p:sldIdLst>
   <p:sldSz cx="12192000" cy="6858000"/>
@@ -113,7 +113,7 @@
   <p:extLst>
     <p:ext uri="{EFAFB233-063F-42B5-8137-9DF3F51BA10A}">
       <p15:sldGuideLst xmlns:p15="http://schemas.microsoft.com/office/powerpoint/2012/main">
-        <p15:guide id="1" orient="horz" pos="2154" userDrawn="1">
+        <p15:guide id="1" orient="horz" pos="2137" userDrawn="1">
           <p15:clr>
             <a:srgbClr val="A4A3A4"/>
           </p15:clr>
@@ -5155,54 +5155,6 @@
           </a:p>
         </p:txBody>
       </p:sp>
-      <p:pic>
-        <p:nvPicPr>
-          <p:cNvPr id="7" name="图片 6"/>
-          <p:cNvPicPr>
-            <a:picLocks noChangeAspect="1"/>
-          </p:cNvPicPr>
-          <p:nvPr/>
-        </p:nvPicPr>
-        <p:blipFill>
-          <a:blip r:embed="rId1"/>
-          <a:stretch>
-            <a:fillRect/>
-          </a:stretch>
-        </p:blipFill>
-        <p:spPr>
-          <a:xfrm>
-            <a:off x="128270" y="1114425"/>
-            <a:ext cx="6118225" cy="4328795"/>
-          </a:xfrm>
-          <a:prstGeom prst="rect">
-            <a:avLst/>
-          </a:prstGeom>
-        </p:spPr>
-      </p:pic>
-      <p:pic>
-        <p:nvPicPr>
-          <p:cNvPr id="8" name="图片 7"/>
-          <p:cNvPicPr>
-            <a:picLocks noChangeAspect="1"/>
-          </p:cNvPicPr>
-          <p:nvPr/>
-        </p:nvPicPr>
-        <p:blipFill>
-          <a:blip r:embed="rId2"/>
-          <a:stretch>
-            <a:fillRect/>
-          </a:stretch>
-        </p:blipFill>
-        <p:spPr>
-          <a:xfrm>
-            <a:off x="128270" y="5901055"/>
-            <a:ext cx="6664960" cy="721360"/>
-          </a:xfrm>
-          <a:prstGeom prst="rect">
-            <a:avLst/>
-          </a:prstGeom>
-        </p:spPr>
-      </p:pic>
       <p:sp>
         <p:nvSpPr>
           <p:cNvPr id="9" name="矩形 8"/>
@@ -5268,78 +5220,6 @@
       </p:sp>
       <p:sp>
         <p:nvSpPr>
-          <p:cNvPr id="18" name="圆角矩形 17"/>
-          <p:cNvSpPr/>
-          <p:nvPr/>
-        </p:nvSpPr>
-        <p:spPr>
-          <a:xfrm>
-            <a:off x="210820" y="5460365"/>
-            <a:ext cx="2817495" cy="371475"/>
-          </a:xfrm>
-          <a:prstGeom prst="roundRect">
-            <a:avLst/>
-          </a:prstGeom>
-          <a:solidFill>
-            <a:schemeClr val="bg2">
-              <a:lumMod val="25000"/>
-            </a:schemeClr>
-          </a:solidFill>
-          <a:ln w="28575">
-            <a:solidFill>
-              <a:schemeClr val="bg2"/>
-            </a:solidFill>
-          </a:ln>
-          <a:effectLst>
-            <a:outerShdw blurRad="50800" dist="38100" dir="2700000" algn="tl" rotWithShape="0">
-              <a:prstClr val="black">
-                <a:alpha val="40000"/>
-              </a:prstClr>
-            </a:outerShdw>
-          </a:effectLst>
-        </p:spPr>
-        <p:style>
-          <a:lnRef idx="2">
-            <a:schemeClr val="accent1">
-              <a:lumMod val="75000"/>
-            </a:schemeClr>
-          </a:lnRef>
-          <a:fillRef idx="1">
-            <a:schemeClr val="accent1"/>
-          </a:fillRef>
-          <a:effectRef idx="0">
-            <a:srgbClr val="FFFFFF"/>
-          </a:effectRef>
-          <a:fontRef idx="minor">
-            <a:schemeClr val="lt1"/>
-          </a:fontRef>
-        </p:style>
-        <p:txBody>
-          <a:bodyPr rtlCol="0" anchor="ctr"/>
-          <a:p>
-            <a:pPr algn="ctr"/>
-            <a:r>
-              <a:rPr lang="en-US" altLang="zh-CN" b="1">
-                <a:solidFill>
-                  <a:schemeClr val="bg2"/>
-                </a:solidFill>
-                <a:latin typeface="Times New Roman" panose="02020603050405020304" charset="0"/>
-                <a:cs typeface="Times New Roman" panose="02020603050405020304" charset="0"/>
-              </a:rPr>
-              <a:t>Code Example</a:t>
-            </a:r>
-            <a:endParaRPr lang="en-US" altLang="zh-CN" b="1">
-              <a:solidFill>
-                <a:schemeClr val="bg2"/>
-              </a:solidFill>
-              <a:latin typeface="Times New Roman" panose="02020603050405020304" charset="0"/>
-              <a:cs typeface="Times New Roman" panose="02020603050405020304" charset="0"/>
-            </a:endParaRPr>
-          </a:p>
-        </p:txBody>
-      </p:sp>
-      <p:sp>
-        <p:nvSpPr>
           <p:cNvPr id="11" name="圆角矩形 10"/>
           <p:cNvSpPr/>
           <p:nvPr/>
@@ -5416,16 +5296,16 @@
       </p:sp>
       <p:sp>
         <p:nvSpPr>
-          <p:cNvPr id="13" name="右箭头 12"/>
+          <p:cNvPr id="16" name="圆角矩形 15"/>
           <p:cNvSpPr/>
           <p:nvPr/>
         </p:nvSpPr>
         <p:spPr>
           <a:xfrm>
-            <a:off x="6010275" y="2055495"/>
-            <a:ext cx="1650365" cy="448310"/>
-          </a:xfrm>
-          <a:prstGeom prst="rightArrow">
+            <a:off x="7979410" y="3265170"/>
+            <a:ext cx="4100830" cy="1252220"/>
+          </a:xfrm>
+          <a:prstGeom prst="roundRect">
             <a:avLst/>
           </a:prstGeom>
           <a:solidFill>
@@ -5467,16 +5347,58 @@
             <a:noAutofit/>
           </a:bodyPr>
           <a:p>
-            <a:pPr lvl="0" algn="ctr">
+            <a:pPr lvl="0" algn="l">
+              <a:lnSpc>
+                <a:spcPct val="120000"/>
+              </a:lnSpc>
+              <a:spcBef>
+                <a:spcPts val="0"/>
+              </a:spcBef>
+              <a:spcAft>
+                <a:spcPts val="0"/>
+              </a:spcAft>
               <a:buClrTx/>
               <a:buSzTx/>
               <a:buFontTx/>
             </a:pPr>
-            <a:endParaRPr lang="en-US" altLang="zh-CN" b="1">
+            <a:r>
+              <a:rPr lang="en-US" altLang="zh-CN">
+                <a:solidFill>
+                  <a:schemeClr val="bg2">
+                    <a:lumMod val="25000"/>
+                  </a:schemeClr>
+                </a:solidFill>
+                <a:latin typeface="Times New Roman" panose="02020603050405020304" charset="0"/>
+                <a:cs typeface="Times New Roman" panose="02020603050405020304" charset="0"/>
+                <a:sym typeface="+mn-ea"/>
+              </a:rPr>
+              <a:t>Standardized CRUD endpoints for </a:t>
+            </a:r>
+            <a:r>
+              <a:rPr lang="en-US" altLang="zh-CN" b="1">
+                <a:solidFill>
+                  <a:schemeClr val="accent1"/>
+                </a:solidFill>
+                <a:latin typeface="Times New Roman" panose="02020603050405020304" charset="0"/>
+                <a:cs typeface="Times New Roman" panose="02020603050405020304" charset="0"/>
+                <a:sym typeface="+mn-ea"/>
+              </a:rPr>
+              <a:t>secure daily data ingestion, paginated retrieval, and anomaly correction</a:t>
+            </a:r>
+            <a:r>
+              <a:rPr lang="en-US" altLang="zh-CN">
+                <a:solidFill>
+                  <a:schemeClr val="accent1"/>
+                </a:solidFill>
+                <a:latin typeface="Times New Roman" panose="02020603050405020304" charset="0"/>
+                <a:cs typeface="Times New Roman" panose="02020603050405020304" charset="0"/>
+                <a:sym typeface="+mn-ea"/>
+              </a:rPr>
+              <a:t>.</a:t>
+            </a:r>
+            <a:endParaRPr lang="en-US" altLang="zh-CN">
               <a:solidFill>
-                <a:schemeClr val="bg2">
-                  <a:lumMod val="25000"/>
-                </a:schemeClr>
+                <a:schemeClr val="accent1"/>
               </a:solidFill>
               <a:latin typeface="Times New Roman" panose="02020603050405020304" charset="0"/>
               <a:cs typeface="Times New Roman" panose="02020603050405020304" charset="0"/>
@@ -5487,14 +5409,14 @@
       </p:sp>
       <p:sp>
         <p:nvSpPr>
-          <p:cNvPr id="16" name="圆角矩形 15"/>
+          <p:cNvPr id="19" name="圆角矩形 18"/>
           <p:cNvSpPr/>
           <p:nvPr/>
         </p:nvSpPr>
         <p:spPr>
           <a:xfrm>
-            <a:off x="7881620" y="1565275"/>
-            <a:ext cx="4025900" cy="1252220"/>
+            <a:off x="7979410" y="5160010"/>
+            <a:ext cx="4100830" cy="1362710"/>
           </a:xfrm>
           <a:prstGeom prst="roundRect">
             <a:avLst/>
@@ -5563,33 +5485,65 @@
                 <a:cs typeface="Times New Roman" panose="02020603050405020304" charset="0"/>
                 <a:sym typeface="+mn-ea"/>
               </a:rPr>
-              <a:t>Standardized CRUD endpoints for </a:t>
+              <a:t>High-level endpoints delivering </a:t>
             </a:r>
             <a:r>
               <a:rPr lang="en-US" altLang="zh-CN" b="1">
                 <a:solidFill>
-                  <a:schemeClr val="accent1"/>
+                  <a:schemeClr val="accent2">
+                    <a:lumMod val="75000"/>
+                  </a:schemeClr>
                 </a:solidFill>
                 <a:latin typeface="Times New Roman" panose="02020603050405020304" charset="0"/>
                 <a:cs typeface="Times New Roman" panose="02020603050405020304" charset="0"/>
                 <a:sym typeface="+mn-ea"/>
               </a:rPr>
-              <a:t>secure daily data ingestion, paginated retrieval, and anomaly correction</a:t>
+              <a:t>predictive behavioral simulations, individual percentile rankings</a:t>
             </a:r>
             <a:r>
               <a:rPr lang="en-US" altLang="zh-CN">
                 <a:solidFill>
-                  <a:schemeClr val="accent1"/>
+                  <a:schemeClr val="accent2">
+                    <a:lumMod val="75000"/>
+                  </a:schemeClr>
                 </a:solidFill>
                 <a:latin typeface="Times New Roman" panose="02020603050405020304" charset="0"/>
                 <a:cs typeface="Times New Roman" panose="02020603050405020304" charset="0"/>
                 <a:sym typeface="+mn-ea"/>
               </a:rPr>
-              <a:t>.</a:t>
-            </a:r>
-            <a:endParaRPr lang="en-US" altLang="zh-CN">
+              <a:t>, </a:t>
+            </a:r>
+            <a:r>
+              <a:rPr lang="en-US" altLang="zh-CN">
+                <a:solidFill>
+                  <a:schemeClr val="bg2">
+                    <a:lumMod val="25000"/>
+                  </a:schemeClr>
+                </a:solidFill>
+                <a:latin typeface="Times New Roman" panose="02020603050405020304" charset="0"/>
+                <a:cs typeface="Times New Roman" panose="02020603050405020304" charset="0"/>
+                <a:sym typeface="+mn-ea"/>
+              </a:rPr>
+              <a:t>and </a:t>
+            </a:r>
+            <a:r>
+              <a:rPr lang="en-US" altLang="zh-CN" b="1">
+                <a:solidFill>
+                  <a:schemeClr val="accent2">
+                    <a:lumMod val="75000"/>
+                  </a:schemeClr>
+                </a:solidFill>
+                <a:latin typeface="Times New Roman" panose="02020603050405020304" charset="0"/>
+                <a:cs typeface="Times New Roman" panose="02020603050405020304" charset="0"/>
+                <a:sym typeface="+mn-ea"/>
+              </a:rPr>
+              <a:t>macro-population health trends.</a:t>
+            </a:r>
+            <a:endParaRPr lang="en-US" altLang="zh-CN" b="1">
               <a:solidFill>
-                <a:schemeClr val="accent1"/>
+                <a:schemeClr val="accent2">
+                  <a:lumMod val="75000"/>
+                </a:schemeClr>
               </a:solidFill>
               <a:latin typeface="Times New Roman" panose="02020603050405020304" charset="0"/>
               <a:cs typeface="Times New Roman" panose="02020603050405020304" charset="0"/>
@@ -5598,6 +5552,30 @@
           </a:p>
         </p:txBody>
       </p:sp>
+      <p:pic>
+        <p:nvPicPr>
+          <p:cNvPr id="2" name="图片 1"/>
+          <p:cNvPicPr>
+            <a:picLocks noChangeAspect="1"/>
+          </p:cNvPicPr>
+          <p:nvPr/>
+        </p:nvPicPr>
+        <p:blipFill>
+          <a:blip r:embed="rId1"/>
+          <a:stretch>
+            <a:fillRect/>
+          </a:stretch>
+        </p:blipFill>
+        <p:spPr>
+          <a:xfrm>
+            <a:off x="210820" y="1223010"/>
+            <a:ext cx="6198235" cy="5336540"/>
+          </a:xfrm>
+          <a:prstGeom prst="rect">
+            <a:avLst/>
+          </a:prstGeom>
+        </p:spPr>
+      </p:pic>
       <p:sp>
         <p:nvSpPr>
           <p:cNvPr id="17" name="右箭头 16"/>
@@ -5606,7 +5584,7 @@
         </p:nvSpPr>
         <p:spPr>
           <a:xfrm>
-            <a:off x="6010275" y="4314190"/>
+            <a:off x="6068060" y="5657215"/>
             <a:ext cx="1650365" cy="448310"/>
           </a:xfrm>
           <a:prstGeom prst="rightArrow">
@@ -5671,16 +5649,16 @@
       </p:sp>
       <p:sp>
         <p:nvSpPr>
-          <p:cNvPr id="19" name="圆角矩形 18"/>
+          <p:cNvPr id="13" name="右箭头 12"/>
           <p:cNvSpPr/>
           <p:nvPr/>
         </p:nvSpPr>
         <p:spPr>
           <a:xfrm>
-            <a:off x="7881620" y="3856990"/>
-            <a:ext cx="4025900" cy="1362710"/>
-          </a:xfrm>
-          <a:prstGeom prst="roundRect">
+            <a:off x="6068060" y="3667125"/>
+            <a:ext cx="1650365" cy="448310"/>
+          </a:xfrm>
+          <a:prstGeom prst="rightArrow">
             <a:avLst/>
           </a:prstGeom>
           <a:solidFill>
@@ -5722,6 +5700,77 @@
             <a:noAutofit/>
           </a:bodyPr>
           <a:p>
+            <a:pPr lvl="0" algn="ctr">
+              <a:buClrTx/>
+              <a:buSzTx/>
+              <a:buFontTx/>
+            </a:pPr>
+            <a:endParaRPr lang="en-US" altLang="zh-CN" b="1">
+              <a:solidFill>
+                <a:schemeClr val="bg2">
+                  <a:lumMod val="25000"/>
+                </a:schemeClr>
+              </a:solidFill>
+              <a:latin typeface="Times New Roman" panose="02020603050405020304" charset="0"/>
+              <a:cs typeface="Times New Roman" panose="02020603050405020304" charset="0"/>
+              <a:sym typeface="+mn-ea"/>
+            </a:endParaRPr>
+          </a:p>
+        </p:txBody>
+      </p:sp>
+      <p:sp>
+        <p:nvSpPr>
+          <p:cNvPr id="14" name="圆角矩形 13"/>
+          <p:cNvSpPr/>
+          <p:nvPr/>
+        </p:nvSpPr>
+        <p:spPr>
+          <a:xfrm>
+            <a:off x="7979410" y="1259840"/>
+            <a:ext cx="4100195" cy="1362710"/>
+          </a:xfrm>
+          <a:prstGeom prst="roundRect">
+            <a:avLst/>
+          </a:prstGeom>
+          <a:solidFill>
+            <a:schemeClr val="bg2"/>
+          </a:solidFill>
+          <a:ln w="28575">
+            <a:solidFill>
+              <a:schemeClr val="bg2">
+                <a:lumMod val="25000"/>
+              </a:schemeClr>
+            </a:solidFill>
+          </a:ln>
+          <a:effectLst>
+            <a:outerShdw blurRad="50800" dist="38100" dir="2700000" algn="tl" rotWithShape="0">
+              <a:prstClr val="black">
+                <a:alpha val="40000"/>
+              </a:prstClr>
+            </a:outerShdw>
+          </a:effectLst>
+        </p:spPr>
+        <p:style>
+          <a:lnRef idx="2">
+            <a:schemeClr val="accent1">
+              <a:lumMod val="75000"/>
+            </a:schemeClr>
+          </a:lnRef>
+          <a:fillRef idx="1">
+            <a:schemeClr val="accent1"/>
+          </a:fillRef>
+          <a:effectRef idx="0">
+            <a:srgbClr val="FFFFFF"/>
+          </a:effectRef>
+          <a:fontRef idx="minor">
+            <a:schemeClr val="lt1"/>
+          </a:fontRef>
+        </p:style>
+        <p:txBody>
+          <a:bodyPr vertOverflow="overflow" horzOverflow="overflow" vert="horz" wrap="square" numCol="1" spcCol="0" rtlCol="0" fromWordArt="0" anchor="ctr" anchorCtr="0" forceAA="0" compatLnSpc="1">
+            <a:noAutofit/>
+          </a:bodyPr>
+          <a:p>
             <a:pPr lvl="0" algn="l">
               <a:lnSpc>
                 <a:spcPct val="120000"/>
@@ -5739,20 +5788,18 @@
             <a:r>
               <a:rPr lang="en-US" altLang="zh-CN">
                 <a:solidFill>
-                  <a:schemeClr val="bg2">
-                    <a:lumMod val="25000"/>
-                  </a:schemeClr>
+                  <a:schemeClr val="tx1"/>
                 </a:solidFill>
                 <a:latin typeface="Times New Roman" panose="02020603050405020304" charset="0"/>
                 <a:cs typeface="Times New Roman" panose="02020603050405020304" charset="0"/>
                 <a:sym typeface="+mn-ea"/>
               </a:rPr>
-              <a:t>High-level endpoints delivering </a:t>
+              <a:t>Secure endpoints for </a:t>
             </a:r>
             <a:r>
               <a:rPr lang="en-US" altLang="zh-CN" b="1">
                 <a:solidFill>
-                  <a:schemeClr val="accent2">
+                  <a:schemeClr val="accent4">
                     <a:lumMod val="75000"/>
                   </a:schemeClr>
                 </a:solidFill>
@@ -5760,51 +5807,92 @@
                 <a:cs typeface="Times New Roman" panose="02020603050405020304" charset="0"/>
                 <a:sym typeface="+mn-ea"/>
               </a:rPr>
-              <a:t>predictive behavioral simulations, individual percentile rankings</a:t>
+              <a:t>user account creation, stateless JWT authentication, and session management</a:t>
             </a:r>
             <a:r>
               <a:rPr lang="en-US" altLang="zh-CN">
                 <a:solidFill>
-                  <a:schemeClr val="accent2">
-                    <a:lumMod val="75000"/>
-                  </a:schemeClr>
+                  <a:schemeClr val="tx1"/>
                 </a:solidFill>
                 <a:latin typeface="Times New Roman" panose="02020603050405020304" charset="0"/>
                 <a:cs typeface="Times New Roman" panose="02020603050405020304" charset="0"/>
                 <a:sym typeface="+mn-ea"/>
               </a:rPr>
-              <a:t>, </a:t>
-            </a:r>
-            <a:r>
-              <a:rPr lang="en-US" altLang="zh-CN">
-                <a:solidFill>
-                  <a:schemeClr val="bg2">
-                    <a:lumMod val="25000"/>
-                  </a:schemeClr>
-                </a:solidFill>
-                <a:latin typeface="Times New Roman" panose="02020603050405020304" charset="0"/>
-                <a:cs typeface="Times New Roman" panose="02020603050405020304" charset="0"/>
-                <a:sym typeface="+mn-ea"/>
-              </a:rPr>
-              <a:t>and </a:t>
-            </a:r>
-            <a:r>
-              <a:rPr lang="en-US" altLang="zh-CN" b="1">
-                <a:solidFill>
-                  <a:schemeClr val="accent2">
-                    <a:lumMod val="75000"/>
-                  </a:schemeClr>
-                </a:solidFill>
-                <a:latin typeface="Times New Roman" panose="02020603050405020304" charset="0"/>
-                <a:cs typeface="Times New Roman" panose="02020603050405020304" charset="0"/>
-                <a:sym typeface="+mn-ea"/>
-              </a:rPr>
-              <a:t>macro-population health trends.</a:t>
+              <a:t>.</a:t>
             </a:r>
             <a:endParaRPr lang="en-US" altLang="zh-CN" b="1">
               <a:solidFill>
-                <a:schemeClr val="accent2">
-                  <a:lumMod val="75000"/>
+                <a:schemeClr val="tx1"/>
+              </a:solidFill>
+              <a:latin typeface="Times New Roman" panose="02020603050405020304" charset="0"/>
+              <a:cs typeface="Times New Roman" panose="02020603050405020304" charset="0"/>
+              <a:sym typeface="+mn-ea"/>
+            </a:endParaRPr>
+          </a:p>
+        </p:txBody>
+      </p:sp>
+      <p:sp>
+        <p:nvSpPr>
+          <p:cNvPr id="15" name="右箭头 14"/>
+          <p:cNvSpPr/>
+          <p:nvPr/>
+        </p:nvSpPr>
+        <p:spPr>
+          <a:xfrm>
+            <a:off x="6068060" y="1757045"/>
+            <a:ext cx="1650365" cy="448310"/>
+          </a:xfrm>
+          <a:prstGeom prst="rightArrow">
+            <a:avLst/>
+          </a:prstGeom>
+          <a:solidFill>
+            <a:schemeClr val="bg2"/>
+          </a:solidFill>
+          <a:ln w="28575">
+            <a:solidFill>
+              <a:schemeClr val="bg2">
+                <a:lumMod val="25000"/>
+              </a:schemeClr>
+            </a:solidFill>
+          </a:ln>
+          <a:effectLst>
+            <a:outerShdw blurRad="50800" dist="38100" dir="2700000" algn="tl" rotWithShape="0">
+              <a:prstClr val="black">
+                <a:alpha val="40000"/>
+              </a:prstClr>
+            </a:outerShdw>
+          </a:effectLst>
+        </p:spPr>
+        <p:style>
+          <a:lnRef idx="2">
+            <a:schemeClr val="accent1">
+              <a:lumMod val="75000"/>
+            </a:schemeClr>
+          </a:lnRef>
+          <a:fillRef idx="1">
+            <a:schemeClr val="accent1"/>
+          </a:fillRef>
+          <a:effectRef idx="0">
+            <a:srgbClr val="FFFFFF"/>
+          </a:effectRef>
+          <a:fontRef idx="minor">
+            <a:schemeClr val="lt1"/>
+          </a:fontRef>
+        </p:style>
+        <p:txBody>
+          <a:bodyPr vertOverflow="overflow" horzOverflow="overflow" vert="horz" wrap="square" numCol="1" spcCol="0" rtlCol="0" fromWordArt="0" anchor="ctr" anchorCtr="0" forceAA="0" compatLnSpc="1">
+            <a:noAutofit/>
+          </a:bodyPr>
+          <a:p>
+            <a:pPr lvl="0" algn="ctr">
+              <a:buClrTx/>
+              <a:buSzTx/>
+              <a:buFontTx/>
+            </a:pPr>
+            <a:endParaRPr lang="en-US" altLang="zh-CN" b="1">
+              <a:solidFill>
+                <a:schemeClr val="bg2">
+                  <a:lumMod val="25000"/>
                 </a:schemeClr>
               </a:solidFill>
               <a:latin typeface="Times New Roman" panose="02020603050405020304" charset="0"/>
@@ -6129,9 +6217,8 @@
                 </a:solidFill>
                 <a:latin typeface="Times New Roman" panose="02020603050405020304" charset="0"/>
                 <a:cs typeface="Times New Roman" panose="02020603050405020304" charset="0"/>
-                <a:sym typeface="+mn-ea"/>
-              </a:rPr>
-              <a:t>JWT-Based Authentication: </a:t>
+              </a:rPr>
+              <a:t>DTO/VO Pattern: Security &amp; Isolation</a:t>
             </a:r>
             <a:endParaRPr lang="en-US" altLang="zh-CN" sz="1600" b="1" i="1">
               <a:solidFill>
@@ -6143,67 +6230,79 @@
               <a:cs typeface="Times New Roman" panose="02020603050405020304" charset="0"/>
             </a:endParaRPr>
           </a:p>
-          <a:p>
-            <a:pPr algn="ctr">
-              <a:lnSpc>
-                <a:spcPct val="130000"/>
-              </a:lnSpc>
-              <a:spcBef>
-                <a:spcPts val="0"/>
-              </a:spcBef>
-              <a:spcAft>
-                <a:spcPts val="0"/>
-              </a:spcAft>
-            </a:pPr>
-            <a:r>
-              <a:rPr lang="en-US" altLang="zh-CN" sz="1600" b="1" i="1">
-                <a:solidFill>
-                  <a:schemeClr val="accent4">
-                    <a:lumMod val="50000"/>
-                  </a:schemeClr>
-                </a:solidFill>
-                <a:latin typeface="Times New Roman" panose="02020603050405020304" charset="0"/>
-                <a:cs typeface="Times New Roman" panose="02020603050405020304" charset="0"/>
-              </a:rPr>
-              <a:t>Security &amp; Isolation</a:t>
-            </a:r>
-            <a:br>
-              <a:rPr lang="en-US" altLang="zh-CN" sz="1600" b="1" i="1">
-                <a:solidFill>
-                  <a:schemeClr val="accent4">
-                    <a:lumMod val="50000"/>
-                  </a:schemeClr>
-                </a:solidFill>
-                <a:latin typeface="Times New Roman" panose="02020603050405020304" charset="0"/>
-                <a:cs typeface="Times New Roman" panose="02020603050405020304" charset="0"/>
-              </a:rPr>
-            </a:br>
-            <a:endParaRPr lang="en-US" altLang="zh-CN" sz="1600" b="1" i="1">
-              <a:solidFill>
-                <a:schemeClr val="accent4">
-                  <a:lumMod val="50000"/>
-                </a:schemeClr>
-              </a:solidFill>
-              <a:latin typeface="Times New Roman" panose="02020603050405020304" charset="0"/>
-              <a:cs typeface="Times New Roman" panose="02020603050405020304" charset="0"/>
-            </a:endParaRPr>
-          </a:p>
-        </p:txBody>
-      </p:sp>
-      <p:sp>
-        <p:nvSpPr>
-          <p:cNvPr id="10" name="文本框 9"/>
-          <p:cNvSpPr txBox="1"/>
+        </p:txBody>
+      </p:sp>
+      <p:pic>
+        <p:nvPicPr>
+          <p:cNvPr id="8" name="图片 7"/>
+          <p:cNvPicPr>
+            <a:picLocks noChangeAspect="1"/>
+          </p:cNvPicPr>
           <p:nvPr>
             <p:custDataLst>
               <p:tags r:id="rId4"/>
             </p:custDataLst>
           </p:nvPr>
-        </p:nvSpPr>
-        <p:spPr>
-          <a:xfrm>
-            <a:off x="285750" y="4084955"/>
-            <a:ext cx="3852545" cy="2458085"/>
+        </p:nvPicPr>
+        <p:blipFill>
+          <a:blip r:embed="rId5"/>
+          <a:stretch>
+            <a:fillRect/>
+          </a:stretch>
+        </p:blipFill>
+        <p:spPr>
+          <a:xfrm>
+            <a:off x="402590" y="2121535"/>
+            <a:ext cx="3462020" cy="179070"/>
+          </a:xfrm>
+          <a:prstGeom prst="rect">
+            <a:avLst/>
+          </a:prstGeom>
+        </p:spPr>
+      </p:pic>
+      <p:pic>
+        <p:nvPicPr>
+          <p:cNvPr id="9" name="图片 8"/>
+          <p:cNvPicPr>
+            <a:picLocks noChangeAspect="1"/>
+          </p:cNvPicPr>
+          <p:nvPr>
+            <p:custDataLst>
+              <p:tags r:id="rId6"/>
+            </p:custDataLst>
+          </p:nvPr>
+        </p:nvPicPr>
+        <p:blipFill>
+          <a:blip r:embed="rId7"/>
+          <a:srcRect b="13256"/>
+          <a:stretch>
+            <a:fillRect/>
+          </a:stretch>
+        </p:blipFill>
+        <p:spPr>
+          <a:xfrm>
+            <a:off x="402590" y="2439670"/>
+            <a:ext cx="3462020" cy="1429385"/>
+          </a:xfrm>
+          <a:prstGeom prst="rect">
+            <a:avLst/>
+          </a:prstGeom>
+        </p:spPr>
+      </p:pic>
+      <p:sp>
+        <p:nvSpPr>
+          <p:cNvPr id="10" name="文本框 9"/>
+          <p:cNvSpPr txBox="1"/>
+          <p:nvPr>
+            <p:custDataLst>
+              <p:tags r:id="rId8"/>
+            </p:custDataLst>
+          </p:nvPr>
+        </p:nvSpPr>
+        <p:spPr>
+          <a:xfrm>
+            <a:off x="281940" y="3933190"/>
+            <a:ext cx="3703320" cy="2458085"/>
           </a:xfrm>
           <a:prstGeom prst="rect">
             <a:avLst/>
@@ -6229,7 +6328,7 @@
               <a:buChar char="•"/>
             </a:pPr>
             <a:r>
-              <a:rPr lang="en-US" altLang="zh-CN" b="1">
+              <a:rPr lang="en-US" altLang="zh-CN">
                 <a:solidFill>
                   <a:schemeClr val="accent4">
                     <a:lumMod val="75000"/>
@@ -6238,10 +6337,10 @@
                 <a:latin typeface="Times New Roman" panose="02020603050405020304" charset="0"/>
                 <a:cs typeface="Times New Roman" panose="02020603050405020304" charset="0"/>
               </a:rPr>
-              <a:t>JWT </a:t>
-            </a:r>
-            <a:r>
-              <a:rPr lang="en-US" altLang="zh-CN">
+              <a:t>Implemented an </a:t>
+            </a:r>
+            <a:r>
+              <a:rPr lang="en-US" altLang="zh-CN" b="1">
                 <a:solidFill>
                   <a:schemeClr val="accent4">
                     <a:lumMod val="75000"/>
@@ -6250,7 +6349,19 @@
                 <a:latin typeface="Times New Roman" panose="02020603050405020304" charset="0"/>
                 <a:cs typeface="Times New Roman" panose="02020603050405020304" charset="0"/>
               </a:rPr>
-              <a:t>enables stateless authentication. </a:t>
+              <a:t>isolation layer</a:t>
+            </a:r>
+            <a:r>
+              <a:rPr lang="en-US" altLang="zh-CN">
+                <a:solidFill>
+                  <a:schemeClr val="accent4">
+                    <a:lumMod val="75000"/>
+                  </a:schemeClr>
+                </a:solidFill>
+                <a:latin typeface="Times New Roman" panose="02020603050405020304" charset="0"/>
+                <a:cs typeface="Times New Roman" panose="02020603050405020304" charset="0"/>
+              </a:rPr>
+              <a:t> to prevent over-posting attacks. </a:t>
             </a:r>
             <a:endParaRPr lang="en-US" altLang="zh-CN">
               <a:solidFill>
@@ -6286,7 +6397,7 @@
                 <a:latin typeface="Times New Roman" panose="02020603050405020304" charset="0"/>
                 <a:cs typeface="Times New Roman" panose="02020603050405020304" charset="0"/>
               </a:rPr>
-              <a:t>ThreadLocal </a:t>
+              <a:t>DTOs</a:t>
             </a:r>
             <a:r>
               <a:rPr lang="en-US" altLang="zh-CN">
@@ -6298,21 +6409,9 @@
                 <a:latin typeface="Times New Roman" panose="02020603050405020304" charset="0"/>
                 <a:cs typeface="Times New Roman" panose="02020603050405020304" charset="0"/>
               </a:rPr>
-              <a:t>context secures identity extraction</a:t>
-            </a:r>
-            <a:r>
-              <a:rPr lang="en-US" altLang="zh-CN" b="1">
-                <a:solidFill>
-                  <a:schemeClr val="accent4">
-                    <a:lumMod val="75000"/>
-                  </a:schemeClr>
-                </a:solidFill>
-                <a:latin typeface="Times New Roman" panose="02020603050405020304" charset="0"/>
-                <a:cs typeface="Times New Roman" panose="02020603050405020304" charset="0"/>
-              </a:rPr>
-              <a:t>.</a:t>
-            </a:r>
-            <a:endParaRPr lang="en-US" altLang="zh-CN" b="1">
+              <a:t> control input boundaries</a:t>
+            </a:r>
+            <a:endParaRPr lang="en-US" altLang="zh-CN">
               <a:solidFill>
                 <a:schemeClr val="accent4">
                   <a:lumMod val="75000"/>
@@ -6337,7 +6436,7 @@
               <a:buChar char="•"/>
             </a:pPr>
             <a:r>
-              <a:rPr lang="en-US" altLang="zh-CN">
+              <a:rPr lang="en-US" altLang="zh-CN" b="1">
                 <a:solidFill>
                   <a:schemeClr val="accent4">
                     <a:lumMod val="75000"/>
@@ -6346,10 +6445,10 @@
                 <a:latin typeface="Times New Roman" panose="02020603050405020304" charset="0"/>
                 <a:cs typeface="Times New Roman" panose="02020603050405020304" charset="0"/>
               </a:rPr>
-              <a:t>Strict </a:t>
-            </a:r>
-            <a:r>
-              <a:rPr lang="en-US" altLang="zh-CN" b="1">
+              <a:t>VOs</a:t>
+            </a:r>
+            <a:r>
+              <a:rPr lang="en-US" altLang="zh-CN">
                 <a:solidFill>
                   <a:schemeClr val="accent4">
                     <a:lumMod val="75000"/>
@@ -6358,21 +6457,9 @@
                 <a:latin typeface="Times New Roman" panose="02020603050405020304" charset="0"/>
                 <a:cs typeface="Times New Roman" panose="02020603050405020304" charset="0"/>
               </a:rPr>
-              <a:t>user_id</a:t>
-            </a:r>
-            <a:r>
-              <a:rPr lang="en-US" altLang="zh-CN">
-                <a:solidFill>
-                  <a:schemeClr val="accent4">
-                    <a:lumMod val="75000"/>
-                  </a:schemeClr>
-                </a:solidFill>
-                <a:latin typeface="Times New Roman" panose="02020603050405020304" charset="0"/>
-                <a:cs typeface="Times New Roman" panose="02020603050405020304" charset="0"/>
-              </a:rPr>
-              <a:t> binding neutralizes IDOR.</a:t>
-            </a:r>
-            <a:endParaRPr lang="zh-CN" altLang="en-US">
+              <a:t> ensure analytical outputs are precisely shaped for frontend requirements.</a:t>
+            </a:r>
+            <a:endParaRPr lang="en-US" altLang="zh-CN">
               <a:solidFill>
                 <a:schemeClr val="accent4">
                   <a:lumMod val="75000"/>
@@ -6390,7 +6477,7 @@
           <p:cNvSpPr/>
           <p:nvPr>
             <p:custDataLst>
-              <p:tags r:id="rId5"/>
+              <p:tags r:id="rId9"/>
             </p:custDataLst>
           </p:nvPr>
         </p:nvSpPr>
@@ -6453,7 +6540,7 @@
           <p:cNvSpPr/>
           <p:nvPr>
             <p:custDataLst>
-              <p:tags r:id="rId6"/>
+              <p:tags r:id="rId10"/>
             </p:custDataLst>
           </p:nvPr>
         </p:nvSpPr>
@@ -6533,7 +6620,7 @@
           <p:cNvSpPr txBox="1"/>
           <p:nvPr>
             <p:custDataLst>
-              <p:tags r:id="rId7"/>
+              <p:tags r:id="rId11"/>
             </p:custDataLst>
           </p:nvPr>
         </p:nvSpPr>
@@ -6627,7 +6714,7 @@
           <p:cNvSpPr txBox="1"/>
           <p:nvPr>
             <p:custDataLst>
-              <p:tags r:id="rId8"/>
+              <p:tags r:id="rId12"/>
             </p:custDataLst>
           </p:nvPr>
         </p:nvSpPr>
@@ -6790,7 +6877,7 @@
           <p:cNvSpPr/>
           <p:nvPr>
             <p:custDataLst>
-              <p:tags r:id="rId9"/>
+              <p:tags r:id="rId13"/>
             </p:custDataLst>
           </p:nvPr>
         </p:nvSpPr>
@@ -6853,7 +6940,7 @@
           <p:cNvSpPr/>
           <p:nvPr>
             <p:custDataLst>
-              <p:tags r:id="rId10"/>
+              <p:tags r:id="rId14"/>
             </p:custDataLst>
           </p:nvPr>
         </p:nvSpPr>
@@ -6928,7 +7015,7 @@
           <p:cNvSpPr txBox="1"/>
           <p:nvPr>
             <p:custDataLst>
-              <p:tags r:id="rId11"/>
+              <p:tags r:id="rId15"/>
             </p:custDataLst>
           </p:nvPr>
         </p:nvSpPr>
@@ -7022,7 +7109,7 @@
           <p:cNvSpPr txBox="1"/>
           <p:nvPr>
             <p:custDataLst>
-              <p:tags r:id="rId12"/>
+              <p:tags r:id="rId16"/>
             </p:custDataLst>
           </p:nvPr>
         </p:nvSpPr>
@@ -7097,62 +7184,6 @@
       <p:pic>
         <p:nvPicPr>
           <p:cNvPr id="42" name="图片 41"/>
-          <p:cNvPicPr>
-            <a:picLocks noChangeAspect="1"/>
-          </p:cNvPicPr>
-          <p:nvPr>
-            <p:custDataLst>
-              <p:tags r:id="rId13"/>
-            </p:custDataLst>
-          </p:nvPr>
-        </p:nvPicPr>
-        <p:blipFill>
-          <a:blip r:embed="rId14"/>
-          <a:stretch>
-            <a:fillRect/>
-          </a:stretch>
-        </p:blipFill>
-        <p:spPr>
-          <a:xfrm>
-            <a:off x="4406265" y="2300605"/>
-            <a:ext cx="3543300" cy="1427480"/>
-          </a:xfrm>
-          <a:prstGeom prst="rect">
-            <a:avLst/>
-          </a:prstGeom>
-        </p:spPr>
-      </p:pic>
-      <p:pic>
-        <p:nvPicPr>
-          <p:cNvPr id="43" name="图片 42"/>
-          <p:cNvPicPr>
-            <a:picLocks noChangeAspect="1"/>
-          </p:cNvPicPr>
-          <p:nvPr>
-            <p:custDataLst>
-              <p:tags r:id="rId15"/>
-            </p:custDataLst>
-          </p:nvPr>
-        </p:nvPicPr>
-        <p:blipFill>
-          <a:blip r:embed="rId16"/>
-          <a:stretch>
-            <a:fillRect/>
-          </a:stretch>
-        </p:blipFill>
-        <p:spPr>
-          <a:xfrm>
-            <a:off x="8705850" y="2300605"/>
-            <a:ext cx="3030855" cy="2052955"/>
-          </a:xfrm>
-          <a:prstGeom prst="rect">
-            <a:avLst/>
-          </a:prstGeom>
-        </p:spPr>
-      </p:pic>
-      <p:pic>
-        <p:nvPicPr>
-          <p:cNvPr id="2" name="图片 1"/>
           <p:cNvPicPr>
             <a:picLocks noChangeAspect="1"/>
           </p:cNvPicPr>
@@ -7170,8 +7201,32 @@
         </p:blipFill>
         <p:spPr>
           <a:xfrm>
-            <a:off x="618490" y="2300605"/>
-            <a:ext cx="3031490" cy="1784350"/>
+            <a:off x="4406265" y="2300605"/>
+            <a:ext cx="3543300" cy="1427480"/>
+          </a:xfrm>
+          <a:prstGeom prst="rect">
+            <a:avLst/>
+          </a:prstGeom>
+        </p:spPr>
+      </p:pic>
+      <p:pic>
+        <p:nvPicPr>
+          <p:cNvPr id="43" name="图片 42"/>
+          <p:cNvPicPr>
+            <a:picLocks noChangeAspect="1"/>
+          </p:cNvPicPr>
+          <p:nvPr/>
+        </p:nvPicPr>
+        <p:blipFill>
+          <a:blip r:embed="rId19"/>
+          <a:stretch>
+            <a:fillRect/>
+          </a:stretch>
+        </p:blipFill>
+        <p:spPr>
+          <a:xfrm>
+            <a:off x="8705850" y="2300605"/>
+            <a:ext cx="3030855" cy="2052955"/>
           </a:xfrm>
           <a:prstGeom prst="rect">
             <a:avLst/>
